--- a/workspace/templates/StandIn_Report.pptx
+++ b/workspace/templates/StandIn_Report.pptx
@@ -4072,7 +4072,7 @@
                   <a:srgbClr val="000000"/>
                 </a:solidFill>
               </a:rPr>
-              <a:t>Your ad aired 4,085 times in April! With the extended reach and access to additional platforms, your ads aired across 34 networks with partners and affiliates in 8 zones.</a:t>
+              <a:t>Your ad aired 1,234 times in April! With the extended reach and access to additional platforms, your ads aired across 12 networks with partners and affiliates in 4 zones.</a:t>
             </a:r>
           </a:p>
         </p:txBody>
